--- a/study_logs/ChronoScope_share_20260821.pptx
+++ b/study_logs/ChronoScope_share_20260821.pptx
@@ -1392,7 +1392,7 @@
           <a:p>
             <a:r>
               <a:rPr lang="en-US" dirty="0"/>
-              <a:t>诚实标注未核实项;别把没查的当结论说。</a:t>
+              <a:t>判分核实结论:repo 的 hf_scope_benchmark.py,论文 sbatch 用 --match_mode relaxed(规范化+双向包含),预测侧抽括号/逗号候选;金侧只有 Wikidata 单一 label,无别名;语义嵌入匹配代码在但论文运行没开。所以口径伪影范围收窄:简称型能匹配上,伪影集中在别名字符串不相交的实体;Drift 用同一匹配器,盲区传导。</a:t>
             </a:r>
             <a:endParaRPr lang="en-US" dirty="0"/>
           </a:p>
@@ -10549,8 +10549,8 @@
         </p:nvSpPr>
         <p:spPr>
           <a:xfrm>
-            <a:off x="822960" y="4754880"/>
-            <a:ext cx="10607040" cy="822960"/>
+            <a:off x="822960" y="4663440"/>
+            <a:ext cx="10607040" cy="1005840"/>
           </a:xfrm>
           <a:prstGeom prst="rect">
             <a:avLst/>
@@ -10566,7 +10566,7 @@
               <a:buNone/>
             </a:pPr>
             <a:r>
-              <a:rPr lang="en-US" sz="1300" dirty="0">
+              <a:rPr lang="en-US" sz="1250" dirty="0">
                 <a:solidFill>
                   <a:srgbClr val="1E2761"/>
                 </a:solidFill>
@@ -10574,9 +10574,9 @@
                 <a:ea typeface="Microsoft YaHei" pitchFamily="34" charset="-122"/>
                 <a:cs typeface="Microsoft YaHei" pitchFamily="34" charset="-120"/>
               </a:rPr>
-              <a:t>另:百万规模是模板确定性生成——规模数字不等于多样性;判分实现(字符串匹配?)分享前待查 repo,已列未核实清单。</a:t>
+              <a:t>另:百万规模是模板确定性生成——规模数字不等于多样性;判分已查 repo 实锤:规范化字符串匹配(relaxed 双向包含),金答案无别名表,语义匹配实现了却未启用——别名不相交的实体(Holland/Netherlands 型)会被判错,Drift 同口径传导。</a:t>
             </a:r>
-            <a:endParaRPr lang="en-US" sz="1300" dirty="0"/>
+            <a:endParaRPr lang="en-US" sz="1250" dirty="0"/>
           </a:p>
         </p:txBody>
       </p:sp>

--- a/study_logs/ChronoScope_share_20260821.pptx
+++ b/study_logs/ChronoScope_share_20260821.pptx
@@ -10574,7 +10574,7 @@
                 <a:ea typeface="Microsoft YaHei" pitchFamily="34" charset="-122"/>
                 <a:cs typeface="Microsoft YaHei" pitchFamily="34" charset="-120"/>
               </a:rPr>
-              <a:t>另:百万规模是模板确定性生成——规模数字不等于多样性;判分已查 repo 实锤:规范化字符串匹配(relaxed 双向包含),金答案无别名表,语义匹配实现了却未启用——别名不相交的实体(Holland/Netherlands 型)会被判错,Drift 同口径传导。</a:t>
+              <a:t>另:百万规模是模板确定性生成——规模数字不等于多样性;判分已查 repo 实锤:relaxed 字符串匹配,金答案无别名表,别名不相交实体会被判错;且链级 present_day_answer 给不了跨属性链的逐轮漂移(我们抽其原卷 52 链实测:65% 跨属性)——drift 率在这些链族是下界。</a:t>
             </a:r>
             <a:endParaRPr lang="en-US" sz="1250" dirty="0"/>
           </a:p>
